--- a/system-design-101/vi/lessons/sd-01-031/slides/sd-01-031.pptx
+++ b/system-design-101/vi/lessons/sd-01-031/slides/sd-01-031.pptx
@@ -11779,7 +11779,7 @@
               <a:t> quả</a:t>
             </a:r>
             <a:r>
-              <a:rPr lang="en-US" sz="2400" dirty="0" spc="-4" kern="0">
+              <a:rPr lang="en-US" sz="2400" dirty="0" spc="0" kern="0">
                 <a:solidFill>
                   <a:srgbClr val="14161C"/>
                 </a:solidFill>
@@ -11787,10 +11787,10 @@
                 <a:ea typeface="Be Vietnam Pro SemiBold" pitchFamily="34" charset="-122"/>
                 <a:cs typeface="Be Vietnam Pro SemiBold" pitchFamily="34" charset="-120"/>
               </a:rPr>
-              <a:t> bằng cơ</a:t>
-            </a:r>
-            <a:r>
-              <a:rPr lang="en-US" sz="2400" dirty="0" spc="-1" kern="0">
+              <a:t> qua</a:t>
+            </a:r>
+            <a:r>
+              <a:rPr lang="en-US" sz="2400" dirty="0" spc="2" kern="0">
                 <a:solidFill>
                   <a:srgbClr val="14161C"/>
                 </a:solidFill>
@@ -11798,10 +11798,10 @@
                 <a:ea typeface="Be Vietnam Pro SemiBold" pitchFamily="34" charset="-122"/>
                 <a:cs typeface="Be Vietnam Pro SemiBold" pitchFamily="34" charset="-120"/>
               </a:rPr>
-              <a:t> chế</a:t>
-            </a:r>
-            <a:r>
-              <a:rPr lang="en-US" sz="2400" dirty="0" spc="1" kern="0">
+              <a:t> dịch</a:t>
+            </a:r>
+            <a:r>
+              <a:rPr lang="en-US" sz="2400" dirty="0" spc="-1" kern="0">
                 <a:solidFill>
                   <a:srgbClr val="14161C"/>
                 </a:solidFill>
@@ -11809,29 +11809,7 @@
                 <a:ea typeface="Be Vietnam Pro SemiBold" pitchFamily="34" charset="-122"/>
                 <a:cs typeface="Be Vietnam Pro SemiBold" pitchFamily="34" charset="-120"/>
               </a:rPr>
-              <a:t> dịch</a:t>
-            </a:r>
-            <a:r>
-              <a:rPr lang="en-US" sz="2400" dirty="0" spc="0" kern="0">
-                <a:solidFill>
-                  <a:srgbClr val="14161C"/>
-                </a:solidFill>
-                <a:latin typeface="Be Vietnam Pro SemiBold" pitchFamily="34" charset="0"/>
-                <a:ea typeface="Be Vietnam Pro SemiBold" pitchFamily="34" charset="-122"/>
-                <a:cs typeface="Be Vietnam Pro SemiBold" pitchFamily="34" charset="-120"/>
-              </a:rPr>
               <a:t> vụ</a:t>
-            </a:r>
-            <a:r>
-              <a:rPr lang="en-US" sz="2400" dirty="0" spc="-1" kern="0">
-                <a:solidFill>
-                  <a:srgbClr val="14161C"/>
-                </a:solidFill>
-                <a:latin typeface="Be Vietnam Pro SemiBold" pitchFamily="34" charset="0"/>
-                <a:ea typeface="Be Vietnam Pro SemiBold" pitchFamily="34" charset="-122"/>
-                <a:cs typeface="Be Vietnam Pro SemiBold" pitchFamily="34" charset="-120"/>
-              </a:rPr>
-              <a:t> cho</a:t>
             </a:r>
             <a:endParaRPr lang="en-US" sz="2400" dirty="0"/>
           </a:p>

--- a/system-design-101/vi/lessons/sd-01-031/slides/sd-01-031.pptx
+++ b/system-design-101/vi/lessons/sd-01-031/slides/sd-01-031.pptx
@@ -10939,7 +10939,7 @@
         <p:spPr>
           <a:xfrm>
             <a:off x="914400" y="1390650"/>
-            <a:ext cx="12382500" cy="1047750"/>
+            <a:ext cx="12382500" cy="2047875"/>
           </a:xfrm>
           <a:prstGeom prst="rect">
             <a:avLst/>
@@ -10948,17 +10948,17 @@
           <a:ln/>
         </p:spPr>
         <p:txBody>
-          <a:bodyPr wrap="square" lIns="0" tIns="36576" rIns="0" bIns="-36576" rtlCol="0" anchor="t"/>
+          <a:bodyPr wrap="square" lIns="0" tIns="52578" rIns="0" bIns="-52578" rtlCol="0" anchor="t"/>
           <a:lstStyle/>
           <a:p>
             <a:pPr algn="l" indent="0" marL="0">
               <a:lnSpc>
-                <a:spcPts val="5184"/>
+                <a:spcPts val="7452"/>
               </a:lnSpc>
               <a:buNone/>
             </a:pPr>
             <a:r>
-              <a:rPr lang="en-US" sz="4800" dirty="0" spc="-1" kern="0">
+              <a:rPr lang="en-US" sz="6900" dirty="0" spc="1" kern="0">
                 <a:solidFill>
                   <a:srgbClr val="14161C"/>
                 </a:solidFill>
@@ -10969,7 +10969,7 @@
               <a:t>Nhận</a:t>
             </a:r>
             <a:r>
-              <a:rPr lang="en-US" sz="4800" dirty="0" spc="-9" kern="0">
+              <a:rPr lang="en-US" sz="6900" dirty="0" spc="-8" kern="0">
                 <a:solidFill>
                   <a:srgbClr val="14161C"/>
                 </a:solidFill>
@@ -10980,7 +10980,7 @@
               <a:t> 202</a:t>
             </a:r>
             <a:r>
-              <a:rPr lang="en-US" sz="4800" dirty="0" spc="4" kern="0">
+              <a:rPr lang="en-US" sz="6900" dirty="0" spc="-1" kern="0">
                 <a:solidFill>
                   <a:srgbClr val="14161C"/>
                 </a:solidFill>
@@ -10991,7 +10991,7 @@
               <a:t> từ</a:t>
             </a:r>
             <a:r>
-              <a:rPr lang="en-US" sz="4800" dirty="0" spc="-1" kern="0">
+              <a:rPr lang="en-US" sz="6900" dirty="0" spc="0" kern="0">
                 <a:solidFill>
                   <a:srgbClr val="14161C"/>
                 </a:solidFill>
@@ -10999,10 +10999,10 @@
                 <a:ea typeface="Bricolage Grotesque ExtraBold" pitchFamily="34" charset="-122"/>
                 <a:cs typeface="Bricolage Grotesque ExtraBold" pitchFamily="34" charset="-120"/>
               </a:rPr>
-              <a:t> dịch</a:t>
-            </a:r>
-            <a:r>
-              <a:rPr lang="en-US" sz="4800" dirty="0" spc="-2" kern="0">
+              <a:t> dịch vụ</a:t>
+            </a:r>
+            <a:r>
+              <a:rPr lang="en-US" sz="6900" dirty="0" spc="-4" kern="0">
                 <a:solidFill>
                   <a:srgbClr val="14161C"/>
                 </a:solidFill>
@@ -11010,10 +11010,10 @@
                 <a:ea typeface="Bricolage Grotesque ExtraBold" pitchFamily="34" charset="-122"/>
                 <a:cs typeface="Bricolage Grotesque ExtraBold" pitchFamily="34" charset="-120"/>
               </a:rPr>
-              <a:t> vụ</a:t>
-            </a:r>
-            <a:r>
-              <a:rPr lang="en-US" sz="4800" dirty="0" spc="-5" kern="0">
+              <a:t> báo</a:t>
+            </a:r>
+            <a:r>
+              <a:rPr lang="en-US" sz="6900" dirty="0" spc="-3" kern="0">
                 <a:solidFill>
                   <a:srgbClr val="14161C"/>
                 </a:solidFill>
@@ -11021,10 +11021,21 @@
                 <a:ea typeface="Bricolage Grotesque ExtraBold" pitchFamily="34" charset="-122"/>
                 <a:cs typeface="Bricolage Grotesque ExtraBold" pitchFamily="34" charset="-120"/>
               </a:rPr>
+              <a:t> cáo:</a:t>
+            </a:r>
+            <a:r>
+              <a:rPr lang="en-US" sz="6900" dirty="0" spc="-5" kern="0">
+                <a:solidFill>
+                  <a:srgbClr val="14161C"/>
+                </a:solidFill>
+                <a:latin typeface="Bricolage Grotesque ExtraBold" pitchFamily="34" charset="0"/>
+                <a:ea typeface="Bricolage Grotesque ExtraBold" pitchFamily="34" charset="-122"/>
+                <a:cs typeface="Bricolage Grotesque ExtraBold" pitchFamily="34" charset="-120"/>
+              </a:rPr>
               <a:t> báo</a:t>
             </a:r>
             <a:r>
-              <a:rPr lang="en-US" sz="4800" dirty="0" spc="-3" kern="0">
+              <a:rPr lang="en-US" sz="6900" dirty="0" spc="-45" kern="0">
                 <a:solidFill>
                   <a:srgbClr val="14161C"/>
                 </a:solidFill>
@@ -11032,10 +11043,10 @@
                 <a:ea typeface="Bricolage Grotesque ExtraBold" pitchFamily="34" charset="-122"/>
                 <a:cs typeface="Bricolage Grotesque ExtraBold" pitchFamily="34" charset="-120"/>
               </a:rPr>
-              <a:t> cáo:</a:t>
-            </a:r>
-            <a:r>
-              <a:rPr lang="en-US" sz="4800" dirty="0" spc="-4" kern="0">
+              <a:t> “đã</a:t>
+            </a:r>
+            <a:r>
+              <a:rPr lang="en-US" sz="6900" dirty="0" spc="-38" kern="0">
                 <a:solidFill>
                   <a:srgbClr val="14161C"/>
                 </a:solidFill>
@@ -11043,31 +11054,9 @@
                 <a:ea typeface="Bricolage Grotesque ExtraBold" pitchFamily="34" charset="-122"/>
                 <a:cs typeface="Bricolage Grotesque ExtraBold" pitchFamily="34" charset="-120"/>
               </a:rPr>
-              <a:t> báo</a:t>
-            </a:r>
-            <a:r>
-              <a:rPr lang="en-US" sz="4800" dirty="0" spc="-32" kern="0">
-                <a:solidFill>
-                  <a:srgbClr val="14161C"/>
-                </a:solidFill>
-                <a:latin typeface="Bricolage Grotesque ExtraBold" pitchFamily="34" charset="0"/>
-                <a:ea typeface="Bricolage Grotesque ExtraBold" pitchFamily="34" charset="-122"/>
-                <a:cs typeface="Bricolage Grotesque ExtraBold" pitchFamily="34" charset="-120"/>
-              </a:rPr>
-              <a:t> “đã</a:t>
-            </a:r>
-            <a:r>
-              <a:rPr lang="en-US" sz="4800" dirty="0" spc="-29" kern="0">
-                <a:solidFill>
-                  <a:srgbClr val="14161C"/>
-                </a:solidFill>
-                <a:latin typeface="Bricolage Grotesque ExtraBold" pitchFamily="34" charset="0"/>
-                <a:ea typeface="Bricolage Grotesque ExtraBold" pitchFamily="34" charset="-122"/>
-                <a:cs typeface="Bricolage Grotesque ExtraBold" pitchFamily="34" charset="-120"/>
-              </a:rPr>
               <a:t> xong”?</a:t>
             </a:r>
-            <a:endParaRPr lang="en-US" sz="4800" dirty="0"/>
+            <a:endParaRPr lang="en-US" sz="6900" dirty="0"/>
           </a:p>
         </p:txBody>
       </p:sp>
@@ -11122,7 +11111,7 @@
         </p:nvSpPr>
         <p:spPr>
           <a:xfrm>
-            <a:off x="2190750" y="2857500"/>
+            <a:off x="2190750" y="3429000"/>
             <a:ext cx="3619500" cy="857250"/>
           </a:xfrm>
           <a:prstGeom prst="roundRect">
@@ -11176,7 +11165,7 @@
         </p:nvSpPr>
         <p:spPr>
           <a:xfrm>
-            <a:off x="12477750" y="2857500"/>
+            <a:off x="12477750" y="3429000"/>
             <a:ext cx="3619500" cy="857250"/>
           </a:xfrm>
           <a:prstGeom prst="roundRect">
@@ -11252,8 +11241,8 @@
         </p:nvSpPr>
         <p:spPr>
           <a:xfrm>
-            <a:off x="4000500" y="3714750"/>
-            <a:ext cx="0" cy="5238750"/>
+            <a:off x="4000500" y="4286250"/>
+            <a:ext cx="0" cy="4667250"/>
           </a:xfrm>
           <a:prstGeom prst="line">
             <a:avLst/>
@@ -11277,8 +11266,8 @@
         </p:nvSpPr>
         <p:spPr>
           <a:xfrm>
-            <a:off x="14287500" y="3714750"/>
-            <a:ext cx="0" cy="5238750"/>
+            <a:off x="14287500" y="4286250"/>
+            <a:ext cx="0" cy="4667250"/>
           </a:xfrm>
           <a:prstGeom prst="line">
             <a:avLst/>
@@ -11302,7 +11291,7 @@
         </p:nvSpPr>
         <p:spPr>
           <a:xfrm>
-            <a:off x="4000500" y="4667250"/>
+            <a:off x="4000500" y="5238750"/>
             <a:ext cx="10191750" cy="0"/>
           </a:xfrm>
           <a:prstGeom prst="line">
@@ -11327,7 +11316,7 @@
         </p:nvSpPr>
         <p:spPr>
           <a:xfrm>
-            <a:off x="4381500" y="4095750"/>
+            <a:off x="4381500" y="4667250"/>
             <a:ext cx="9525000" cy="476250"/>
           </a:xfrm>
           <a:prstGeom prst="rect">
@@ -11421,8 +11410,8 @@
         </p:nvSpPr>
         <p:spPr>
           <a:xfrm flipH="1">
-            <a:off x="4095750" y="5810250"/>
-            <a:ext cx="10191750" cy="0"/>
+            <a:off x="4095750" y="6381750"/>
+            <a:ext cx="10096500" cy="0"/>
           </a:xfrm>
           <a:prstGeom prst="line">
             <a:avLst/>
@@ -11446,7 +11435,7 @@
         </p:nvSpPr>
         <p:spPr>
           <a:xfrm>
-            <a:off x="4381500" y="5238750"/>
+            <a:off x="4381500" y="5810250"/>
             <a:ext cx="9525000" cy="476250"/>
           </a:xfrm>
           <a:prstGeom prst="rect">
@@ -11562,7 +11551,7 @@
         </p:nvSpPr>
         <p:spPr>
           <a:xfrm>
-            <a:off x="914400" y="6286500"/>
+            <a:off x="914400" y="6858000"/>
             <a:ext cx="6096000" cy="857250"/>
           </a:xfrm>
           <a:prstGeom prst="roundRect">
@@ -11671,7 +11660,7 @@
         </p:nvSpPr>
         <p:spPr>
           <a:xfrm>
-            <a:off x="4000500" y="8191500"/>
+            <a:off x="4000500" y="8763000"/>
             <a:ext cx="10191750" cy="0"/>
           </a:xfrm>
           <a:prstGeom prst="line">
@@ -11696,7 +11685,7 @@
         </p:nvSpPr>
         <p:spPr>
           <a:xfrm>
-            <a:off x="4381500" y="7620000"/>
+            <a:off x="4381500" y="8191500"/>
             <a:ext cx="9525000" cy="476250"/>
           </a:xfrm>
           <a:prstGeom prst="rect">
